--- a/dist/초2/수학/수와계산/초2_수학_수와계산_11_1과0의곱,곱셈표.pptx
+++ b/dist/초2/수학/수와계산/초2_수학_수와계산_11_1과0의곱,곱셈표.pptx
@@ -121,13 +121,13 @@
   <p:extLst>
     <p:ext uri="{521415D9-36F7-43E2-AB2F-B90AF26B5E84}">
       <p14:sectionLst xmlns:p14="http://schemas.microsoft.com/office/powerpoint/2010/main">
-        <p14:section name="도입" id="{31f188ff-3627-c60d-1e30-29589f5a77b7}">
+        <p14:section name="도입" id="{7448c537-1841-e265-afe7-bd7629257f78}">
           <p14:sldIdLst>
             <p14:sldId id="256"/>
             <p14:sldId id="257"/>
           </p14:sldIdLst>
         </p14:section>
-        <p14:section name="개념" id="{d8e196bf-5fad-80e7-9b69-3f7110cb72eb}">
+        <p14:section name="개념" id="{f94bcc63-2bb6-5e63-bd40-87a3c23cbe54}">
           <p14:sldIdLst>
             <p14:sldId id="258"/>
             <p14:sldId id="259"/>
@@ -136,26 +136,26 @@
             <p14:sldId id="262"/>
           </p14:sldIdLst>
         </p14:section>
-        <p14:section name="연습" id="{cf4e22dc-80d2-4133-9350-6b3ae5043c5e}">
+        <p14:section name="연습" id="{6572487f-0b1c-5cac-4b32-6de7751eefcb}">
           <p14:sldIdLst>
             <p14:sldId id="263"/>
             <p14:sldId id="264"/>
             <p14:sldId id="265"/>
           </p14:sldIdLst>
         </p14:section>
-        <p14:section name="확인" id="{c606b1f7-5d0f-3e89-e8b6-897c00e4e8b1}">
+        <p14:section name="확인" id="{e44233a3-77b6-db03-bc9c-f6858392fc83}">
           <p14:sldIdLst>
             <p14:sldId id="266"/>
             <p14:sldId id="267"/>
             <p14:sldId id="268"/>
           </p14:sldIdLst>
         </p14:section>
-        <p14:section name="정리" id="{7e2d78c8-758a-be54-0a44-7829b771bd77}">
+        <p14:section name="정리" id="{2d75a387-5c0a-0f7a-d140-4ac300f5c159}">
           <p14:sldIdLst>
             <p14:sldId id="269"/>
           </p14:sldIdLst>
         </p14:section>
-        <p14:section name="보충" id="{520fea5d-396a-2569-8585-5852e5470cab}">
+        <p14:section name="보충" id="{fb3ddd97-7c02-c0a0-c8fa-2a1ba3eaf329}">
           <p14:sldIdLst>
             <p14:sldId id="270"/>
           </p14:sldIdLst>

--- a/dist/초2/수학/수와계산/초2_수학_수와계산_11_1과0의곱,곱셈표.pptx
+++ b/dist/초2/수학/수와계산/초2_수학_수와계산_11_1과0의곱,곱셈표.pptx
@@ -121,13 +121,13 @@
   <p:extLst>
     <p:ext uri="{521415D9-36F7-43E2-AB2F-B90AF26B5E84}">
       <p14:sectionLst xmlns:p14="http://schemas.microsoft.com/office/powerpoint/2010/main">
-        <p14:section name="도입" id="{7448c537-1841-e265-afe7-bd7629257f78}">
+        <p14:section name="도입" id="{640a4c35-7d30-9157-7258-a486d45685e5}">
           <p14:sldIdLst>
             <p14:sldId id="256"/>
             <p14:sldId id="257"/>
           </p14:sldIdLst>
         </p14:section>
-        <p14:section name="개념" id="{f94bcc63-2bb6-5e63-bd40-87a3c23cbe54}">
+        <p14:section name="개념" id="{b8721396-2d02-2827-5e4d-03155df5bf89}">
           <p14:sldIdLst>
             <p14:sldId id="258"/>
             <p14:sldId id="259"/>
@@ -136,26 +136,26 @@
             <p14:sldId id="262"/>
           </p14:sldIdLst>
         </p14:section>
-        <p14:section name="연습" id="{6572487f-0b1c-5cac-4b32-6de7751eefcb}">
+        <p14:section name="연습" id="{5b536de6-d1f9-9090-7f00-fa8503519f47}">
           <p14:sldIdLst>
             <p14:sldId id="263"/>
             <p14:sldId id="264"/>
             <p14:sldId id="265"/>
           </p14:sldIdLst>
         </p14:section>
-        <p14:section name="확인" id="{e44233a3-77b6-db03-bc9c-f6858392fc83}">
+        <p14:section name="확인" id="{f517e0d2-73b2-6704-e408-cf6a0910ed6b}">
           <p14:sldIdLst>
             <p14:sldId id="266"/>
             <p14:sldId id="267"/>
             <p14:sldId id="268"/>
           </p14:sldIdLst>
         </p14:section>
-        <p14:section name="정리" id="{2d75a387-5c0a-0f7a-d140-4ac300f5c159}">
+        <p14:section name="정리" id="{178cfed7-83b1-9b03-64fb-be24299e422d}">
           <p14:sldIdLst>
             <p14:sldId id="269"/>
           </p14:sldIdLst>
         </p14:section>
-        <p14:section name="보충" id="{fb3ddd97-7c02-c0a0-c8fa-2a1ba3eaf329}">
+        <p14:section name="보충" id="{8b83dc86-2e5c-c8ef-3ea3-53e0d905c1a7}">
           <p14:sldIdLst>
             <p14:sldId id="270"/>
           </p14:sldIdLst>
@@ -9911,7 +9911,7 @@
           </p:nvPr>
         </p:nvGraphicFramePr>
         <p:xfrm>
-          <a:off x="2802636" y="2245360"/>
+          <a:off x="2802636" y="2286635"/>
           <a:ext cx="6583680" cy="914400"/>
         </p:xfrm>
         <a:graphic>
@@ -9924,7 +9924,7 @@
                 <a:gridCol w="1645920"/>
                 <a:gridCol w="1645920"/>
               </a:tblGrid>
-              <a:tr h="528320">
+              <a:tr h="511810">
                 <a:tc>
                   <a:txBody>
                     <a:bodyPr/>
@@ -10198,7 +10198,7 @@
                   </a:tcPr>
                 </a:tc>
               </a:tr>
-              <a:tr h="528320">
+              <a:tr h="511810">
                 <a:tc>
                   <a:txBody>
                     <a:bodyPr/>
@@ -10472,7 +10472,7 @@
                   </a:tcPr>
                 </a:tc>
               </a:tr>
-              <a:tr h="528320">
+              <a:tr h="511810">
                 <a:tc>
                   <a:txBody>
                     <a:bodyPr/>
@@ -10746,7 +10746,7 @@
                   </a:tcPr>
                 </a:tc>
               </a:tr>
-              <a:tr h="528320">
+              <a:tr h="511810">
                 <a:tc>
                   <a:txBody>
                     <a:bodyPr/>
@@ -11020,7 +11020,7 @@
                   </a:tcPr>
                 </a:tc>
               </a:tr>
-              <a:tr h="528320">
+              <a:tr h="511810">
                 <a:tc>
                   <a:txBody>
                     <a:bodyPr/>
@@ -11974,7 +11974,7 @@
           </p:nvPr>
         </p:nvGraphicFramePr>
         <p:xfrm>
-          <a:off x="2436876" y="1420622"/>
+          <a:off x="2436876" y="1470152"/>
           <a:ext cx="7315200" cy="914400"/>
         </p:xfrm>
         <a:graphic>
@@ -11989,7 +11989,7 @@
                 <a:gridCol w="1219200"/>
                 <a:gridCol w="1219200"/>
               </a:tblGrid>
-              <a:tr h="528320">
+              <a:tr h="511810">
                 <a:tc>
                   <a:txBody>
                     <a:bodyPr/>
@@ -12399,7 +12399,7 @@
                   </a:tcPr>
                 </a:tc>
               </a:tr>
-              <a:tr h="528320">
+              <a:tr h="511810">
                 <a:tc>
                   <a:txBody>
                     <a:bodyPr/>
@@ -12809,7 +12809,7 @@
                   </a:tcPr>
                 </a:tc>
               </a:tr>
-              <a:tr h="528320">
+              <a:tr h="511810">
                 <a:tc>
                   <a:txBody>
                     <a:bodyPr/>
@@ -13219,7 +13219,7 @@
                   </a:tcPr>
                 </a:tc>
               </a:tr>
-              <a:tr h="528320">
+              <a:tr h="511810">
                 <a:tc>
                   <a:txBody>
                     <a:bodyPr/>
@@ -13629,7 +13629,7 @@
                   </a:tcPr>
                 </a:tc>
               </a:tr>
-              <a:tr h="528320">
+              <a:tr h="511810">
                 <a:tc>
                   <a:txBody>
                     <a:bodyPr/>
@@ -14039,7 +14039,7 @@
                   </a:tcPr>
                 </a:tc>
               </a:tr>
-              <a:tr h="528320">
+              <a:tr h="511810">
                 <a:tc>
                   <a:txBody>
                     <a:bodyPr/>
@@ -14582,7 +14582,7 @@
           </p:nvPr>
         </p:nvGraphicFramePr>
         <p:xfrm>
-          <a:off x="548640" y="1333500"/>
+          <a:off x="548640" y="1409700"/>
           <a:ext cx="11091672" cy="914400"/>
         </p:xfrm>
         <a:graphic>
@@ -14601,7 +14601,7 @@
                 <a:gridCol w="1109167"/>
                 <a:gridCol w="1109167"/>
               </a:tblGrid>
-              <a:tr h="487680">
+              <a:tr h="472440">
                 <a:tc>
                   <a:txBody>
                     <a:bodyPr/>
@@ -15283,7 +15283,7 @@
                   </a:tcPr>
                 </a:tc>
               </a:tr>
-              <a:tr h="487680">
+              <a:tr h="472440">
                 <a:tc>
                   <a:txBody>
                     <a:bodyPr/>
@@ -15965,7 +15965,7 @@
                   </a:tcPr>
                 </a:tc>
               </a:tr>
-              <a:tr h="487680">
+              <a:tr h="472440">
                 <a:tc>
                   <a:txBody>
                     <a:bodyPr/>
@@ -16647,7 +16647,7 @@
                   </a:tcPr>
                 </a:tc>
               </a:tr>
-              <a:tr h="487680">
+              <a:tr h="472440">
                 <a:tc>
                   <a:txBody>
                     <a:bodyPr/>
@@ -17329,7 +17329,7 @@
                   </a:tcPr>
                 </a:tc>
               </a:tr>
-              <a:tr h="487680">
+              <a:tr h="472440">
                 <a:tc>
                   <a:txBody>
                     <a:bodyPr/>
@@ -18011,7 +18011,7 @@
                   </a:tcPr>
                 </a:tc>
               </a:tr>
-              <a:tr h="487680">
+              <a:tr h="472440">
                 <a:tc>
                   <a:txBody>
                     <a:bodyPr/>
@@ -18693,7 +18693,7 @@
                   </a:tcPr>
                 </a:tc>
               </a:tr>
-              <a:tr h="487680">
+              <a:tr h="472440">
                 <a:tc>
                   <a:txBody>
                     <a:bodyPr/>
@@ -19375,7 +19375,7 @@
                   </a:tcPr>
                 </a:tc>
               </a:tr>
-              <a:tr h="487680">
+              <a:tr h="472440">
                 <a:tc>
                   <a:txBody>
                     <a:bodyPr/>
@@ -20057,7 +20057,7 @@
                   </a:tcPr>
                 </a:tc>
               </a:tr>
-              <a:tr h="487680">
+              <a:tr h="472440">
                 <a:tc>
                   <a:txBody>
                     <a:bodyPr/>
@@ -20739,7 +20739,7 @@
                   </a:tcPr>
                 </a:tc>
               </a:tr>
-              <a:tr h="487680">
+              <a:tr h="472440">
                 <a:tc>
                   <a:txBody>
                     <a:bodyPr/>
